--- a/dist/weeks-포트폴리오제작/포트폴리오제작_08주차_중간발표.pptx
+++ b/dist/weeks-포트폴리오제작/포트폴리오제작_08주차_중간발표.pptx
@@ -2244,7 +2244,7 @@
                 <a:ea typeface="Pretendard" pitchFamily="34" charset="-122"/>
                 <a:cs typeface="Pretendard" pitchFamily="34" charset="-120"/>
               </a:rPr>
-              <a:t>90분 — 발표 70분 · 동료 피드백 작성 10분 · 종합 정리 10분</a:t>
+              <a:t>120분 — 발표 80분 · 동료 피드백 작성 10분 · 종합 정리 10분</a:t>
             </a:r>
             <a:endParaRPr lang="en-US" sz="1200" dirty="0"/>
           </a:p>
@@ -3830,7 +3830,7 @@
                 <a:ea typeface="Pretendard Black" pitchFamily="34" charset="-122"/>
                 <a:cs typeface="Pretendard Black" pitchFamily="34" charset="-120"/>
               </a:rPr>
-              <a:t>오늘의 90분</a:t>
+              <a:t>오늘의 120분</a:t>
             </a:r>
             <a:endParaRPr lang="en-US" sz="3000" dirty="0"/>
           </a:p>
@@ -3869,7 +3869,7 @@
                 <a:ea typeface="Pretendard" pitchFamily="34" charset="-122"/>
                 <a:cs typeface="Pretendard" pitchFamily="34" charset="-120"/>
               </a:rPr>
-              <a:t>발표 70분 · 동료 피드백 작성 10분 · 종합 정리 10분</a:t>
+              <a:t>발표 80분 · 동료 피드백 작성 10분 · 종합 정리 10분</a:t>
             </a:r>
             <a:endParaRPr lang="en-US" sz="1150" dirty="0"/>
           </a:p>
@@ -3909,7 +3909,7 @@
         <p:spPr>
           <a:xfrm>
             <a:off x="640080" y="1719072"/>
-            <a:ext cx="1600200" cy="932688"/>
+            <a:ext cx="1600200" cy="691896"/>
           </a:xfrm>
           <a:prstGeom prst="rect">
             <a:avLst/>
@@ -3933,7 +3933,7 @@
                 <a:ea typeface="Pretendard" pitchFamily="34" charset="-122"/>
                 <a:cs typeface="Pretendard" pitchFamily="34" charset="-120"/>
               </a:rPr>
-              <a:t>00:00–01:10</a:t>
+              <a:t>00:00–00:10</a:t>
             </a:r>
             <a:endParaRPr lang="en-US" sz="1050" dirty="0"/>
           </a:p>
@@ -3948,7 +3948,7 @@
         <p:spPr>
           <a:xfrm>
             <a:off x="2377440" y="1719072"/>
-            <a:ext cx="6888175" cy="932688"/>
+            <a:ext cx="6888175" cy="691896"/>
           </a:xfrm>
           <a:prstGeom prst="rect">
             <a:avLst/>
@@ -3972,7 +3972,7 @@
                 <a:ea typeface="Pretendard" pitchFamily="34" charset="-122"/>
                 <a:cs typeface="Pretendard" pitchFamily="34" charset="-120"/>
               </a:rPr>
-              <a:t>개인별 발표 · 각 5분</a:t>
+              <a:t>발표 순서 · 피드백 규칙 안내</a:t>
             </a:r>
             <a:endParaRPr lang="en-US" sz="1300" dirty="0"/>
           </a:p>
@@ -3987,7 +3987,7 @@
         <p:spPr>
           <a:xfrm>
             <a:off x="9265615" y="1719072"/>
-            <a:ext cx="2286000" cy="932688"/>
+            <a:ext cx="2286000" cy="691896"/>
           </a:xfrm>
           <a:prstGeom prst="rect">
             <a:avLst/>
@@ -4011,7 +4011,7 @@
                 <a:ea typeface="Pretendard" pitchFamily="34" charset="-122"/>
                 <a:cs typeface="Pretendard" pitchFamily="34" charset="-120"/>
               </a:rPr>
-              <a:t>발표 + 즉시 코멘트</a:t>
+              <a:t>안내</a:t>
             </a:r>
             <a:endParaRPr lang="en-US" sz="1050" dirty="0"/>
           </a:p>
@@ -4025,7 +4025,7 @@
         </p:nvSpPr>
         <p:spPr>
           <a:xfrm>
-            <a:off x="640080" y="2633472"/>
+            <a:off x="640080" y="2392680"/>
             <a:ext cx="10911535" cy="7315"/>
           </a:xfrm>
           <a:prstGeom prst="rect">
@@ -4050,8 +4050,8 @@
         </p:nvSpPr>
         <p:spPr>
           <a:xfrm>
-            <a:off x="640080" y="2651760"/>
-            <a:ext cx="1600200" cy="932688"/>
+            <a:off x="640080" y="2410968"/>
+            <a:ext cx="1600200" cy="691896"/>
           </a:xfrm>
           <a:prstGeom prst="rect">
             <a:avLst/>
@@ -4075,7 +4075,7 @@
                 <a:ea typeface="Pretendard" pitchFamily="34" charset="-122"/>
                 <a:cs typeface="Pretendard" pitchFamily="34" charset="-120"/>
               </a:rPr>
-              <a:t>01:10–01:20</a:t>
+              <a:t>00:10–01:00</a:t>
             </a:r>
             <a:endParaRPr lang="en-US" sz="1050" dirty="0"/>
           </a:p>
@@ -4089,8 +4089,8 @@
         </p:nvSpPr>
         <p:spPr>
           <a:xfrm>
-            <a:off x="2377440" y="2651760"/>
-            <a:ext cx="6888175" cy="932688"/>
+            <a:off x="2377440" y="2410968"/>
+            <a:ext cx="6888175" cy="691896"/>
           </a:xfrm>
           <a:prstGeom prst="rect">
             <a:avLst/>
@@ -4114,7 +4114,7 @@
                 <a:ea typeface="Pretendard" pitchFamily="34" charset="-122"/>
                 <a:cs typeface="Pretendard" pitchFamily="34" charset="-120"/>
               </a:rPr>
-              <a:t>동료 피드백 작성</a:t>
+              <a:t>개인별 발표 1부 · 각 6분</a:t>
             </a:r>
             <a:endParaRPr lang="en-US" sz="1300" dirty="0"/>
           </a:p>
@@ -4128,8 +4128,8 @@
         </p:nvSpPr>
         <p:spPr>
           <a:xfrm>
-            <a:off x="9265615" y="2651760"/>
-            <a:ext cx="2286000" cy="932688"/>
+            <a:off x="9265615" y="2410968"/>
+            <a:ext cx="2286000" cy="691896"/>
           </a:xfrm>
           <a:prstGeom prst="rect">
             <a:avLst/>
@@ -4153,7 +4153,7 @@
                 <a:ea typeface="Pretendard" pitchFamily="34" charset="-122"/>
                 <a:cs typeface="Pretendard" pitchFamily="34" charset="-120"/>
               </a:rPr>
-              <a:t>개인 워크</a:t>
+              <a:t>발표 + 즉시 코멘트</a:t>
             </a:r>
             <a:endParaRPr lang="en-US" sz="1050" dirty="0"/>
           </a:p>
@@ -4167,7 +4167,7 @@
         </p:nvSpPr>
         <p:spPr>
           <a:xfrm>
-            <a:off x="640080" y="3566160"/>
+            <a:off x="640080" y="3084576"/>
             <a:ext cx="10911535" cy="7315"/>
           </a:xfrm>
           <a:prstGeom prst="rect">
@@ -4192,8 +4192,111 @@
         </p:nvSpPr>
         <p:spPr>
           <a:xfrm>
-            <a:off x="640080" y="3584448"/>
-            <a:ext cx="1600200" cy="932688"/>
+            <a:off x="640080" y="3102864"/>
+            <a:ext cx="1600200" cy="691896"/>
+          </a:xfrm>
+          <a:prstGeom prst="rect">
+            <a:avLst/>
+          </a:prstGeom>
+          <a:noFill/>
+          <a:ln/>
+        </p:spPr>
+        <p:txBody>
+          <a:bodyPr wrap="square" lIns="0" tIns="0" rIns="0" bIns="0" rtlCol="0" anchor="ctr"/>
+          <a:lstStyle/>
+          <a:p>
+            <a:pPr indent="0" marL="0">
+              <a:buNone/>
+            </a:pPr>
+            <a:r>
+              <a:rPr lang="en-US" sz="1050" spc="60" kern="0" dirty="0">
+                <a:solidFill>
+                  <a:srgbClr val="9B9B9B"/>
+                </a:solidFill>
+                <a:latin typeface="Pretendard" pitchFamily="34" charset="0"/>
+                <a:ea typeface="Pretendard" pitchFamily="34" charset="-122"/>
+                <a:cs typeface="Pretendard" pitchFamily="34" charset="-120"/>
+              </a:rPr>
+              <a:t>01:00–01:10</a:t>
+            </a:r>
+            <a:endParaRPr lang="en-US" sz="1050" dirty="0"/>
+          </a:p>
+        </p:txBody>
+      </p:sp>
+      <p:sp>
+        <p:nvSpPr>
+          <p:cNvPr id="19" name="Text 17"/>
+          <p:cNvSpPr/>
+          <p:nvPr/>
+        </p:nvSpPr>
+        <p:spPr>
+          <a:xfrm>
+            <a:off x="2377440" y="3102864"/>
+            <a:ext cx="6888175" cy="691896"/>
+          </a:xfrm>
+          <a:prstGeom prst="rect">
+            <a:avLst/>
+          </a:prstGeom>
+          <a:noFill/>
+          <a:ln/>
+        </p:spPr>
+        <p:txBody>
+          <a:bodyPr wrap="square" lIns="0" tIns="0" rIns="0" bIns="0" rtlCol="0" anchor="ctr"/>
+          <a:lstStyle/>
+          <a:p>
+            <a:pPr indent="0" marL="0">
+              <a:buNone/>
+            </a:pPr>
+            <a:r>
+              <a:rPr lang="en-US" sz="1100" dirty="0">
+                <a:solidFill>
+                  <a:srgbClr val="9B9B9B"/>
+                </a:solidFill>
+                <a:latin typeface="Pretendard" pitchFamily="34" charset="0"/>
+                <a:ea typeface="Pretendard" pitchFamily="34" charset="-122"/>
+                <a:cs typeface="Pretendard" pitchFamily="34" charset="-120"/>
+              </a:rPr>
+              <a:t>휴식</a:t>
+            </a:r>
+            <a:endParaRPr lang="en-US" sz="1100" dirty="0"/>
+          </a:p>
+        </p:txBody>
+      </p:sp>
+      <p:sp>
+        <p:nvSpPr>
+          <p:cNvPr id="20" name="Shape 18"/>
+          <p:cNvSpPr/>
+          <p:nvPr/>
+        </p:nvSpPr>
+        <p:spPr>
+          <a:xfrm>
+            <a:off x="640080" y="3776472"/>
+            <a:ext cx="10911535" cy="7315"/>
+          </a:xfrm>
+          <a:prstGeom prst="rect">
+            <a:avLst/>
+          </a:prstGeom>
+          <a:solidFill>
+            <a:srgbClr val="EFEFEF"/>
+          </a:solidFill>
+          <a:ln w="12700">
+            <a:solidFill>
+              <a:srgbClr val="EFEFEF"/>
+            </a:solidFill>
+            <a:prstDash val="solid"/>
+          </a:ln>
+        </p:spPr>
+      </p:sp>
+      <p:sp>
+        <p:nvSpPr>
+          <p:cNvPr id="21" name="Text 19"/>
+          <p:cNvSpPr/>
+          <p:nvPr/>
+        </p:nvSpPr>
+        <p:spPr>
+          <a:xfrm>
+            <a:off x="640080" y="3794760"/>
+            <a:ext cx="1600200" cy="691896"/>
           </a:xfrm>
           <a:prstGeom prst="rect">
             <a:avLst/>
@@ -4217,7 +4320,7 @@
                 <a:ea typeface="Pretendard" pitchFamily="34" charset="-122"/>
                 <a:cs typeface="Pretendard" pitchFamily="34" charset="-120"/>
               </a:rPr>
-              <a:t>01:20–01:30</a:t>
+              <a:t>01:10–01:40</a:t>
             </a:r>
             <a:endParaRPr lang="en-US" sz="1050" dirty="0"/>
           </a:p>
@@ -4225,14 +4328,14 @@
       </p:sp>
       <p:sp>
         <p:nvSpPr>
-          <p:cNvPr id="19" name="Text 17"/>
-          <p:cNvSpPr/>
-          <p:nvPr/>
-        </p:nvSpPr>
-        <p:spPr>
-          <a:xfrm>
-            <a:off x="2377440" y="3584448"/>
-            <a:ext cx="6888175" cy="932688"/>
+          <p:cNvPr id="22" name="Text 20"/>
+          <p:cNvSpPr/>
+          <p:nvPr/>
+        </p:nvSpPr>
+        <p:spPr>
+          <a:xfrm>
+            <a:off x="2377440" y="3794760"/>
+            <a:ext cx="6888175" cy="691896"/>
           </a:xfrm>
           <a:prstGeom prst="rect">
             <a:avLst/>
@@ -4256,6 +4359,290 @@
                 <a:ea typeface="Pretendard" pitchFamily="34" charset="-122"/>
                 <a:cs typeface="Pretendard" pitchFamily="34" charset="-120"/>
               </a:rPr>
+              <a:t>개인별 발표 2부 · 각 6분</a:t>
+            </a:r>
+            <a:endParaRPr lang="en-US" sz="1300" dirty="0"/>
+          </a:p>
+        </p:txBody>
+      </p:sp>
+      <p:sp>
+        <p:nvSpPr>
+          <p:cNvPr id="23" name="Text 21"/>
+          <p:cNvSpPr/>
+          <p:nvPr/>
+        </p:nvSpPr>
+        <p:spPr>
+          <a:xfrm>
+            <a:off x="9265615" y="3794760"/>
+            <a:ext cx="2286000" cy="691896"/>
+          </a:xfrm>
+          <a:prstGeom prst="rect">
+            <a:avLst/>
+          </a:prstGeom>
+          <a:noFill/>
+          <a:ln/>
+        </p:spPr>
+        <p:txBody>
+          <a:bodyPr wrap="square" lIns="0" tIns="0" rIns="0" bIns="0" rtlCol="0" anchor="ctr"/>
+          <a:lstStyle/>
+          <a:p>
+            <a:pPr algn="r" indent="0" marL="0">
+              <a:buNone/>
+            </a:pPr>
+            <a:r>
+              <a:rPr lang="en-US" sz="1050" dirty="0">
+                <a:solidFill>
+                  <a:srgbClr val="6E6E6E"/>
+                </a:solidFill>
+                <a:latin typeface="Pretendard" pitchFamily="34" charset="0"/>
+                <a:ea typeface="Pretendard" pitchFamily="34" charset="-122"/>
+                <a:cs typeface="Pretendard" pitchFamily="34" charset="-120"/>
+              </a:rPr>
+              <a:t>발표 + 즉시 코멘트</a:t>
+            </a:r>
+            <a:endParaRPr lang="en-US" sz="1050" dirty="0"/>
+          </a:p>
+        </p:txBody>
+      </p:sp>
+      <p:sp>
+        <p:nvSpPr>
+          <p:cNvPr id="24" name="Shape 22"/>
+          <p:cNvSpPr/>
+          <p:nvPr/>
+        </p:nvSpPr>
+        <p:spPr>
+          <a:xfrm>
+            <a:off x="640080" y="4468368"/>
+            <a:ext cx="10911535" cy="7315"/>
+          </a:xfrm>
+          <a:prstGeom prst="rect">
+            <a:avLst/>
+          </a:prstGeom>
+          <a:solidFill>
+            <a:srgbClr val="DCDCDC"/>
+          </a:solidFill>
+          <a:ln w="12700">
+            <a:solidFill>
+              <a:srgbClr val="DCDCDC"/>
+            </a:solidFill>
+            <a:prstDash val="solid"/>
+          </a:ln>
+        </p:spPr>
+      </p:sp>
+      <p:sp>
+        <p:nvSpPr>
+          <p:cNvPr id="25" name="Text 23"/>
+          <p:cNvSpPr/>
+          <p:nvPr/>
+        </p:nvSpPr>
+        <p:spPr>
+          <a:xfrm>
+            <a:off x="640080" y="4486656"/>
+            <a:ext cx="1600200" cy="691896"/>
+          </a:xfrm>
+          <a:prstGeom prst="rect">
+            <a:avLst/>
+          </a:prstGeom>
+          <a:noFill/>
+          <a:ln/>
+        </p:spPr>
+        <p:txBody>
+          <a:bodyPr wrap="square" lIns="0" tIns="0" rIns="0" bIns="0" rtlCol="0" anchor="ctr"/>
+          <a:lstStyle/>
+          <a:p>
+            <a:pPr indent="0" marL="0">
+              <a:buNone/>
+            </a:pPr>
+            <a:r>
+              <a:rPr lang="en-US" sz="1050" b="1" spc="60" kern="0" dirty="0">
+                <a:solidFill>
+                  <a:srgbClr val="111111"/>
+                </a:solidFill>
+                <a:latin typeface="Pretendard" pitchFamily="34" charset="0"/>
+                <a:ea typeface="Pretendard" pitchFamily="34" charset="-122"/>
+                <a:cs typeface="Pretendard" pitchFamily="34" charset="-120"/>
+              </a:rPr>
+              <a:t>01:40–01:50</a:t>
+            </a:r>
+            <a:endParaRPr lang="en-US" sz="1050" dirty="0"/>
+          </a:p>
+        </p:txBody>
+      </p:sp>
+      <p:sp>
+        <p:nvSpPr>
+          <p:cNvPr id="26" name="Text 24"/>
+          <p:cNvSpPr/>
+          <p:nvPr/>
+        </p:nvSpPr>
+        <p:spPr>
+          <a:xfrm>
+            <a:off x="2377440" y="4486656"/>
+            <a:ext cx="6888175" cy="691896"/>
+          </a:xfrm>
+          <a:prstGeom prst="rect">
+            <a:avLst/>
+          </a:prstGeom>
+          <a:noFill/>
+          <a:ln/>
+        </p:spPr>
+        <p:txBody>
+          <a:bodyPr wrap="square" lIns="0" tIns="0" rIns="0" bIns="0" rtlCol="0" anchor="ctr"/>
+          <a:lstStyle/>
+          <a:p>
+            <a:pPr indent="0" marL="0">
+              <a:buNone/>
+            </a:pPr>
+            <a:r>
+              <a:rPr lang="en-US" sz="1300" b="1" dirty="0">
+                <a:solidFill>
+                  <a:srgbClr val="111111"/>
+                </a:solidFill>
+                <a:latin typeface="Pretendard" pitchFamily="34" charset="0"/>
+                <a:ea typeface="Pretendard" pitchFamily="34" charset="-122"/>
+                <a:cs typeface="Pretendard" pitchFamily="34" charset="-120"/>
+              </a:rPr>
+              <a:t>동료 피드백 작성</a:t>
+            </a:r>
+            <a:endParaRPr lang="en-US" sz="1300" dirty="0"/>
+          </a:p>
+        </p:txBody>
+      </p:sp>
+      <p:sp>
+        <p:nvSpPr>
+          <p:cNvPr id="27" name="Text 25"/>
+          <p:cNvSpPr/>
+          <p:nvPr/>
+        </p:nvSpPr>
+        <p:spPr>
+          <a:xfrm>
+            <a:off x="9265615" y="4486656"/>
+            <a:ext cx="2286000" cy="691896"/>
+          </a:xfrm>
+          <a:prstGeom prst="rect">
+            <a:avLst/>
+          </a:prstGeom>
+          <a:noFill/>
+          <a:ln/>
+        </p:spPr>
+        <p:txBody>
+          <a:bodyPr wrap="square" lIns="0" tIns="0" rIns="0" bIns="0" rtlCol="0" anchor="ctr"/>
+          <a:lstStyle/>
+          <a:p>
+            <a:pPr algn="r" indent="0" marL="0">
+              <a:buNone/>
+            </a:pPr>
+            <a:r>
+              <a:rPr lang="en-US" sz="1050" dirty="0">
+                <a:solidFill>
+                  <a:srgbClr val="6E6E6E"/>
+                </a:solidFill>
+                <a:latin typeface="Pretendard" pitchFamily="34" charset="0"/>
+                <a:ea typeface="Pretendard" pitchFamily="34" charset="-122"/>
+                <a:cs typeface="Pretendard" pitchFamily="34" charset="-120"/>
+              </a:rPr>
+              <a:t>개인 워크</a:t>
+            </a:r>
+            <a:endParaRPr lang="en-US" sz="1050" dirty="0"/>
+          </a:p>
+        </p:txBody>
+      </p:sp>
+      <p:sp>
+        <p:nvSpPr>
+          <p:cNvPr id="28" name="Shape 26"/>
+          <p:cNvSpPr/>
+          <p:nvPr/>
+        </p:nvSpPr>
+        <p:spPr>
+          <a:xfrm>
+            <a:off x="640080" y="5160264"/>
+            <a:ext cx="10911535" cy="7315"/>
+          </a:xfrm>
+          <a:prstGeom prst="rect">
+            <a:avLst/>
+          </a:prstGeom>
+          <a:solidFill>
+            <a:srgbClr val="DCDCDC"/>
+          </a:solidFill>
+          <a:ln w="12700">
+            <a:solidFill>
+              <a:srgbClr val="DCDCDC"/>
+            </a:solidFill>
+            <a:prstDash val="solid"/>
+          </a:ln>
+        </p:spPr>
+      </p:sp>
+      <p:sp>
+        <p:nvSpPr>
+          <p:cNvPr id="29" name="Text 27"/>
+          <p:cNvSpPr/>
+          <p:nvPr/>
+        </p:nvSpPr>
+        <p:spPr>
+          <a:xfrm>
+            <a:off x="640080" y="5178552"/>
+            <a:ext cx="1600200" cy="691896"/>
+          </a:xfrm>
+          <a:prstGeom prst="rect">
+            <a:avLst/>
+          </a:prstGeom>
+          <a:noFill/>
+          <a:ln/>
+        </p:spPr>
+        <p:txBody>
+          <a:bodyPr wrap="square" lIns="0" tIns="0" rIns="0" bIns="0" rtlCol="0" anchor="ctr"/>
+          <a:lstStyle/>
+          <a:p>
+            <a:pPr indent="0" marL="0">
+              <a:buNone/>
+            </a:pPr>
+            <a:r>
+              <a:rPr lang="en-US" sz="1050" b="1" spc="60" kern="0" dirty="0">
+                <a:solidFill>
+                  <a:srgbClr val="111111"/>
+                </a:solidFill>
+                <a:latin typeface="Pretendard" pitchFamily="34" charset="0"/>
+                <a:ea typeface="Pretendard" pitchFamily="34" charset="-122"/>
+                <a:cs typeface="Pretendard" pitchFamily="34" charset="-120"/>
+              </a:rPr>
+              <a:t>01:50–02:00</a:t>
+            </a:r>
+            <a:endParaRPr lang="en-US" sz="1050" dirty="0"/>
+          </a:p>
+        </p:txBody>
+      </p:sp>
+      <p:sp>
+        <p:nvSpPr>
+          <p:cNvPr id="30" name="Text 28"/>
+          <p:cNvSpPr/>
+          <p:nvPr/>
+        </p:nvSpPr>
+        <p:spPr>
+          <a:xfrm>
+            <a:off x="2377440" y="5178552"/>
+            <a:ext cx="6888175" cy="691896"/>
+          </a:xfrm>
+          <a:prstGeom prst="rect">
+            <a:avLst/>
+          </a:prstGeom>
+          <a:noFill/>
+          <a:ln/>
+        </p:spPr>
+        <p:txBody>
+          <a:bodyPr wrap="square" lIns="0" tIns="0" rIns="0" bIns="0" rtlCol="0" anchor="ctr"/>
+          <a:lstStyle/>
+          <a:p>
+            <a:pPr indent="0" marL="0">
+              <a:buNone/>
+            </a:pPr>
+            <a:r>
+              <a:rPr lang="en-US" sz="1300" b="1" dirty="0">
+                <a:solidFill>
+                  <a:srgbClr val="111111"/>
+                </a:solidFill>
+                <a:latin typeface="Pretendard" pitchFamily="34" charset="0"/>
+                <a:ea typeface="Pretendard" pitchFamily="34" charset="-122"/>
+                <a:cs typeface="Pretendard" pitchFamily="34" charset="-120"/>
+              </a:rPr>
               <a:t>종합 피드백 및 잔여 일정 점검</a:t>
             </a:r>
             <a:endParaRPr lang="en-US" sz="1300" dirty="0"/>
@@ -4264,14 +4651,14 @@
       </p:sp>
       <p:sp>
         <p:nvSpPr>
-          <p:cNvPr id="20" name="Text 18"/>
-          <p:cNvSpPr/>
-          <p:nvPr/>
-        </p:nvSpPr>
-        <p:spPr>
-          <a:xfrm>
-            <a:off x="9265615" y="3584448"/>
-            <a:ext cx="2286000" cy="932688"/>
+          <p:cNvPr id="31" name="Text 29"/>
+          <p:cNvSpPr/>
+          <p:nvPr/>
+        </p:nvSpPr>
+        <p:spPr>
+          <a:xfrm>
+            <a:off x="9265615" y="5178552"/>
+            <a:ext cx="2286000" cy="691896"/>
           </a:xfrm>
           <a:prstGeom prst="rect">
             <a:avLst/>
@@ -4303,14 +4690,14 @@
       </p:sp>
       <p:sp>
         <p:nvSpPr>
-          <p:cNvPr id="21" name="Shape 19"/>
-          <p:cNvSpPr/>
-          <p:nvPr/>
-        </p:nvSpPr>
-        <p:spPr>
-          <a:xfrm>
-            <a:off x="640080" y="4828032"/>
-            <a:ext cx="10911535" cy="969264"/>
+          <p:cNvPr id="32" name="Shape 30"/>
+          <p:cNvSpPr/>
+          <p:nvPr/>
+        </p:nvSpPr>
+        <p:spPr>
+          <a:xfrm>
+            <a:off x="640080" y="5852160"/>
+            <a:ext cx="10911535" cy="7315"/>
           </a:xfrm>
           <a:prstGeom prst="rect">
             <a:avLst/>
@@ -4328,88 +4715,7 @@
       </p:sp>
       <p:sp>
         <p:nvSpPr>
-          <p:cNvPr id="22" name="Text 20"/>
-          <p:cNvSpPr/>
-          <p:nvPr/>
-        </p:nvSpPr>
-        <p:spPr>
-          <a:xfrm>
-            <a:off x="1097280" y="5010912"/>
-            <a:ext cx="2743200" cy="256032"/>
-          </a:xfrm>
-          <a:prstGeom prst="rect">
-            <a:avLst/>
-          </a:prstGeom>
-          <a:noFill/>
-          <a:ln/>
-        </p:spPr>
-        <p:txBody>
-          <a:bodyPr wrap="square" lIns="0" tIns="0" rIns="0" bIns="0" rtlCol="0" anchor="ctr"/>
-          <a:lstStyle/>
-          <a:p>
-            <a:pPr indent="0" marL="0">
-              <a:buNone/>
-            </a:pPr>
-            <a:r>
-              <a:rPr lang="en-US" sz="950" spc="240" kern="0" dirty="0">
-                <a:solidFill>
-                  <a:srgbClr val="9A9A9A"/>
-                </a:solidFill>
-                <a:latin typeface="Pretendard" pitchFamily="34" charset="0"/>
-                <a:ea typeface="Pretendard" pitchFamily="34" charset="-122"/>
-                <a:cs typeface="Pretendard" pitchFamily="34" charset="-120"/>
-              </a:rPr>
-              <a:t>오늘 끝나면</a:t>
-            </a:r>
-            <a:endParaRPr lang="en-US" sz="950" dirty="0"/>
-          </a:p>
-        </p:txBody>
-      </p:sp>
-      <p:sp>
-        <p:nvSpPr>
-          <p:cNvPr id="23" name="Text 21"/>
-          <p:cNvSpPr/>
-          <p:nvPr/>
-        </p:nvSpPr>
-        <p:spPr>
-          <a:xfrm>
-            <a:off x="1097280" y="5285232"/>
-            <a:ext cx="9997135" cy="365760"/>
-          </a:xfrm>
-          <a:prstGeom prst="rect">
-            <a:avLst/>
-          </a:prstGeom>
-          <a:noFill/>
-          <a:ln/>
-        </p:spPr>
-        <p:txBody>
-          <a:bodyPr wrap="square" lIns="0" tIns="0" rIns="0" bIns="0" rtlCol="0" anchor="ctr"/>
-          <a:lstStyle/>
-          <a:p>
-            <a:pPr indent="0" marL="0">
-              <a:lnSpc>
-                <a:spcPct val="126000"/>
-              </a:lnSpc>
-              <a:buNone/>
-            </a:pPr>
-            <a:r>
-              <a:rPr lang="en-US" sz="1600" dirty="0">
-                <a:solidFill>
-                  <a:srgbClr val="FFFFFF"/>
-                </a:solidFill>
-                <a:latin typeface="Pretendard Black" pitchFamily="34" charset="0"/>
-                <a:ea typeface="Pretendard Black" pitchFamily="34" charset="-122"/>
-                <a:cs typeface="Pretendard Black" pitchFamily="34" charset="-120"/>
-              </a:rPr>
-              <a:t>내 포트폴리오의 강한 지점과 약한 지점을 남의 눈으로 확인하고, 남은 7주의 수정 우선순위를 정합니다.</a:t>
-            </a:r>
-            <a:endParaRPr lang="en-US" sz="1600" dirty="0"/>
-          </a:p>
-        </p:txBody>
-      </p:sp>
-      <p:sp>
-        <p:nvSpPr>
-          <p:cNvPr id="24" name="Shape 22"/>
+          <p:cNvPr id="33" name="Shape 31"/>
           <p:cNvSpPr/>
           <p:nvPr/>
         </p:nvSpPr>
@@ -4434,7 +4740,7 @@
       </p:sp>
       <p:sp>
         <p:nvSpPr>
-          <p:cNvPr id="25" name="Text 23"/>
+          <p:cNvPr id="34" name="Text 32"/>
           <p:cNvSpPr/>
           <p:nvPr/>
         </p:nvSpPr>
@@ -4473,7 +4779,7 @@
       </p:sp>
       <p:sp>
         <p:nvSpPr>
-          <p:cNvPr id="26" name="Text 24"/>
+          <p:cNvPr id="35" name="Text 33"/>
           <p:cNvSpPr/>
           <p:nvPr/>
         </p:nvSpPr>

--- a/dist/weeks-포트폴리오제작/포트폴리오제작_08주차_중간발표.pptx
+++ b/dist/weeks-포트폴리오제작/포트폴리오제작_08주차_중간발표.pptx
@@ -511,7 +511,8 @@
           <a:p>
             <a:r>
               <a:rPr lang="en-US" dirty="0"/>
-              <a:t>원본은 '팀별 발표 각 5분'이지만 개인 포트폴리오 과목이라 개인 발표로 잡았다. 20명이면 70분에 5분씩은 14명분이므로, 인원에 따라 4분으로 줄이거나 2주에 나눠 진행해야 한다.</a:t>
+              <a:t>[운영 메모]
+원본은 '팀별 발표 각 5분'이지만 개인 포트폴리오 과목이라 개인 발표로 잡았다. 20명이면 70분에 5분씩은 14명분이므로, 인원에 따라 4분으로 줄이거나 2주에 나눠 진행해야 한다.</a:t>
             </a:r>
             <a:endParaRPr lang="en-US" dirty="0"/>
           </a:p>
@@ -599,7 +600,8 @@
           <a:p>
             <a:r>
               <a:rPr lang="en-US" dirty="0"/>
-              <a:t>'안 할 것'을 명시하게 하는 것이 핵심이다. 모든 피드백을 반영하려다 방향이 흔들리는 경우가 가장 많다.</a:t>
+              <a:t>[운영 메모]
+'안 할 것'을 명시하게 하는 것이 핵심이다. 모든 피드백을 반영하려다 방향이 흔들리는 경우가 가장 많다.</a:t>
             </a:r>
             <a:endParaRPr lang="en-US" dirty="0"/>
           </a:p>
@@ -687,7 +689,8 @@
           <a:p>
             <a:r>
               <a:rPr lang="en-US" dirty="0"/>
-              <a:t>발표마다 즉시 30초 코멘트를 주는 편이 마지막에 몰아서 하는 것보다 효과적이다. 타이머를 화면에 띄우고 5분에서 정확히 끊을 것.</a:t>
+              <a:t>[운영 메모]
+발표마다 즉시 30초 코멘트를 주는 편이 마지막에 몰아서 하는 것보다 효과적이다. 타이머를 화면에 띄우고 5분에서 정확히 끊을 것.</a:t>
             </a:r>
             <a:endParaRPr lang="en-US" dirty="0"/>
           </a:p>
@@ -775,7 +778,8 @@
           <a:p>
             <a:r>
               <a:rPr lang="en-US" dirty="0"/>
-              <a:t>5주차에도 같은 말을 했지만 여기서 한 번 더. 실제로 이번이 마지막이다.</a:t>
+              <a:t>[운영 메모]
+5주차에도 같은 말을 했지만 여기서 한 번 더. 실제로 이번이 마지막이다.</a:t>
             </a:r>
             <a:endParaRPr lang="en-US" dirty="0"/>
           </a:p>
@@ -863,7 +867,8 @@
           <a:p>
             <a:r>
               <a:rPr lang="en-US" dirty="0"/>
-              <a:t>시작 전에 이 슬라이드를 띄우고 한 번 읽어줄 것.</a:t>
+              <a:t>[운영 메모]
+시작 전에 이 슬라이드를 띄우고 한 번 읽어줄 것.</a:t>
             </a:r>
             <a:endParaRPr lang="en-US" dirty="0"/>
           </a:p>
@@ -951,7 +956,8 @@
           <a:p>
             <a:r>
               <a:rPr lang="en-US" dirty="0"/>
-              <a:t>시간 배분을 화면에 띄워두고 발표를 진행하면 스스로 조절한다.</a:t>
+              <a:t>[운영 메모]
+시간 배분을 화면에 띄워두고 발표를 진행하면 스스로 조절한다.</a:t>
             </a:r>
             <a:endParaRPr lang="en-US" dirty="0"/>
           </a:p>
@@ -1039,7 +1045,8 @@
           <a:p>
             <a:r>
               <a:rPr lang="en-US" dirty="0"/>
-              <a:t>오른쪽 발표를 하면 5분을 쓰고 아무것도 못 얻는다는 점을 실감시킬 것.</a:t>
+              <a:t>[운영 메모]
+오른쪽 발표를 하면 5분을 쓰고 아무것도 못 얻는다는 점을 실감시킬 것.</a:t>
             </a:r>
             <a:endParaRPr lang="en-US" dirty="0"/>
           </a:p>
@@ -1127,7 +1134,8 @@
           <a:p>
             <a:r>
               <a:rPr lang="en-US" dirty="0"/>
-              <a:t>발표가 다 끝난 뒤 10분 동안 이 슬라이드를 보며 작성하게 한다.</a:t>
+              <a:t>[운영 메모]
+발표가 다 끝난 뒤 10분 동안 이 슬라이드를 보며 작성하게 한다.</a:t>
             </a:r>
             <a:endParaRPr lang="en-US" dirty="0"/>
           </a:p>
@@ -1215,7 +1223,8 @@
           <a:p>
             <a:r>
               <a:rPr lang="en-US" dirty="0"/>
-              <a:t>03을 요구하는 것이 이 슬라이드의 핵심 장치. 학생들은 모든 피드백을 반영하려다 지친다.</a:t>
+              <a:t>[운영 메모]
+03을 요구하는 것이 이 슬라이드의 핵심 장치. 학생들은 모든 피드백을 반영하려다 지친다.</a:t>
             </a:r>
             <a:endParaRPr lang="en-US" dirty="0"/>
           </a:p>
@@ -1303,7 +1312,8 @@
           <a:p>
             <a:r>
               <a:rPr lang="en-US" dirty="0"/>
-              <a:t>10~11주 부하를 미리 경고하면 준비하는 학생이 늘어난다.</a:t>
+              <a:t>[운영 메모]
+10~11주 부하를 미리 경고하면 준비하는 학생이 늘어난다.</a:t>
             </a:r>
             <a:endParaRPr lang="en-US" dirty="0"/>
           </a:p>
